--- a/Three Plans One Cluster - Cluster Deck.pptx
+++ b/Three Plans One Cluster - Cluster Deck.pptx
@@ -332,7 +332,6 @@
         <c:overlap val="100"/>
         <c:axId val="2094734554"/>
         <c:axId val="2094734552"/>
-        <c:axId val="2094734556"/>
       </c:barChart>
       <c:catAx>
         <c:axId val="2094734554"/>
@@ -614,7 +613,6 @@
         <c:overlap val="0"/>
         <c:axId val="2094734554"/>
         <c:axId val="2094734552"/>
-        <c:axId val="2094734556"/>
       </c:barChart>
       <c:lineChart>
         <c:varyColors val="0"/>
@@ -773,7 +771,6 @@
         <c:marker val="1"/>
         <c:axId val="2094734554"/>
         <c:axId val="2094734552"/>
-        <c:axId val="2094734556"/>
       </c:lineChart>
       <c:catAx>
         <c:axId val="2094734554"/>
@@ -1176,7 +1173,6 @@
         <c:marker val="1"/>
         <c:axId val="2094734554"/>
         <c:axId val="2094734552"/>
-        <c:axId val="2094734556"/>
       </c:lineChart>
       <c:catAx>
         <c:axId val="2094734554"/>
